--- a/figures/Testpyramide.pptx
+++ b/figures/Testpyramide.pptx
@@ -1041,6 +1041,9 @@
         <a:bodyPr/>
         <a:lstStyle/>
         <a:p>
+          <a:br>
+            <a:rPr lang="de-DE" sz="2000" dirty="0"/>
+          </a:br>
           <a:r>
             <a:rPr lang="de-DE" sz="2000" dirty="0" err="1"/>
             <a:t>Akzep</a:t>
@@ -1050,7 +1053,7 @@
             <a:t>-</a:t>
           </a:r>
           <a:br>
-            <a:rPr lang="de-DE" sz="2000"/>
+            <a:rPr lang="de-DE" sz="2000" dirty="0"/>
           </a:br>
           <a:r>
             <a:rPr lang="de-DE" sz="2000" dirty="0" err="1"/>
@@ -1296,6 +1299,9 @@
             </a:spcAft>
             <a:buNone/>
           </a:pPr>
+          <a:br>
+            <a:rPr lang="de-DE" sz="2000" kern="1200" dirty="0"/>
+          </a:br>
           <a:r>
             <a:rPr lang="de-DE" sz="2000" kern="1200" dirty="0" err="1"/>
             <a:t>Akzep</a:t>
@@ -1305,7 +1311,7 @@
             <a:t>-</a:t>
           </a:r>
           <a:br>
-            <a:rPr lang="de-DE" sz="2000" kern="1200"/>
+            <a:rPr lang="de-DE" sz="2000" kern="1200" dirty="0"/>
           </a:br>
           <a:r>
             <a:rPr lang="de-DE" sz="2000" kern="1200" dirty="0" err="1"/>
@@ -2979,7 +2985,7 @@
           <a:p>
             <a:fld id="{FBF94FF0-D490-4F8F-80CF-ADA16F99B118}" type="datetimeFigureOut">
               <a:rPr lang="de-DE" smtClean="0"/>
-              <a:t>06.04.2025</a:t>
+              <a:t>14.06.25</a:t>
             </a:fld>
             <a:endParaRPr lang="de-DE"/>
           </a:p>
@@ -3033,7 +3039,7 @@
           <a:p>
             <a:fld id="{8F4DBEBF-D0C9-4B7B-97D1-F70115F9845C}" type="slidenum">
               <a:rPr lang="de-DE" smtClean="0"/>
-              <a:t>‹Nr.›</a:t>
+              <a:t>‹#›</a:t>
             </a:fld>
             <a:endParaRPr lang="de-DE"/>
           </a:p>
@@ -3177,7 +3183,7 @@
           <a:p>
             <a:fld id="{FBF94FF0-D490-4F8F-80CF-ADA16F99B118}" type="datetimeFigureOut">
               <a:rPr lang="de-DE" smtClean="0"/>
-              <a:t>06.04.2025</a:t>
+              <a:t>14.06.25</a:t>
             </a:fld>
             <a:endParaRPr lang="de-DE"/>
           </a:p>
@@ -3231,7 +3237,7 @@
           <a:p>
             <a:fld id="{8F4DBEBF-D0C9-4B7B-97D1-F70115F9845C}" type="slidenum">
               <a:rPr lang="de-DE" smtClean="0"/>
-              <a:t>‹Nr.›</a:t>
+              <a:t>‹#›</a:t>
             </a:fld>
             <a:endParaRPr lang="de-DE"/>
           </a:p>
@@ -3385,7 +3391,7 @@
           <a:p>
             <a:fld id="{FBF94FF0-D490-4F8F-80CF-ADA16F99B118}" type="datetimeFigureOut">
               <a:rPr lang="de-DE" smtClean="0"/>
-              <a:t>06.04.2025</a:t>
+              <a:t>14.06.25</a:t>
             </a:fld>
             <a:endParaRPr lang="de-DE"/>
           </a:p>
@@ -3439,7 +3445,7 @@
           <a:p>
             <a:fld id="{8F4DBEBF-D0C9-4B7B-97D1-F70115F9845C}" type="slidenum">
               <a:rPr lang="de-DE" smtClean="0"/>
-              <a:t>‹Nr.›</a:t>
+              <a:t>‹#›</a:t>
             </a:fld>
             <a:endParaRPr lang="de-DE"/>
           </a:p>
@@ -3583,7 +3589,7 @@
           <a:p>
             <a:fld id="{FBF94FF0-D490-4F8F-80CF-ADA16F99B118}" type="datetimeFigureOut">
               <a:rPr lang="de-DE" smtClean="0"/>
-              <a:t>06.04.2025</a:t>
+              <a:t>14.06.25</a:t>
             </a:fld>
             <a:endParaRPr lang="de-DE"/>
           </a:p>
@@ -3637,7 +3643,7 @@
           <a:p>
             <a:fld id="{8F4DBEBF-D0C9-4B7B-97D1-F70115F9845C}" type="slidenum">
               <a:rPr lang="de-DE" smtClean="0"/>
-              <a:t>‹Nr.›</a:t>
+              <a:t>‹#›</a:t>
             </a:fld>
             <a:endParaRPr lang="de-DE"/>
           </a:p>
@@ -3858,7 +3864,7 @@
           <a:p>
             <a:fld id="{FBF94FF0-D490-4F8F-80CF-ADA16F99B118}" type="datetimeFigureOut">
               <a:rPr lang="de-DE" smtClean="0"/>
-              <a:t>06.04.2025</a:t>
+              <a:t>14.06.25</a:t>
             </a:fld>
             <a:endParaRPr lang="de-DE"/>
           </a:p>
@@ -3912,7 +3918,7 @@
           <a:p>
             <a:fld id="{8F4DBEBF-D0C9-4B7B-97D1-F70115F9845C}" type="slidenum">
               <a:rPr lang="de-DE" smtClean="0"/>
-              <a:t>‹Nr.›</a:t>
+              <a:t>‹#›</a:t>
             </a:fld>
             <a:endParaRPr lang="de-DE"/>
           </a:p>
@@ -4123,7 +4129,7 @@
           <a:p>
             <a:fld id="{FBF94FF0-D490-4F8F-80CF-ADA16F99B118}" type="datetimeFigureOut">
               <a:rPr lang="de-DE" smtClean="0"/>
-              <a:t>06.04.2025</a:t>
+              <a:t>14.06.25</a:t>
             </a:fld>
             <a:endParaRPr lang="de-DE"/>
           </a:p>
@@ -4177,7 +4183,7 @@
           <a:p>
             <a:fld id="{8F4DBEBF-D0C9-4B7B-97D1-F70115F9845C}" type="slidenum">
               <a:rPr lang="de-DE" smtClean="0"/>
-              <a:t>‹Nr.›</a:t>
+              <a:t>‹#›</a:t>
             </a:fld>
             <a:endParaRPr lang="de-DE"/>
           </a:p>
@@ -4535,7 +4541,7 @@
           <a:p>
             <a:fld id="{FBF94FF0-D490-4F8F-80CF-ADA16F99B118}" type="datetimeFigureOut">
               <a:rPr lang="de-DE" smtClean="0"/>
-              <a:t>06.04.2025</a:t>
+              <a:t>14.06.25</a:t>
             </a:fld>
             <a:endParaRPr lang="de-DE"/>
           </a:p>
@@ -4589,7 +4595,7 @@
           <a:p>
             <a:fld id="{8F4DBEBF-D0C9-4B7B-97D1-F70115F9845C}" type="slidenum">
               <a:rPr lang="de-DE" smtClean="0"/>
-              <a:t>‹Nr.›</a:t>
+              <a:t>‹#›</a:t>
             </a:fld>
             <a:endParaRPr lang="de-DE"/>
           </a:p>
@@ -4676,7 +4682,7 @@
           <a:p>
             <a:fld id="{FBF94FF0-D490-4F8F-80CF-ADA16F99B118}" type="datetimeFigureOut">
               <a:rPr lang="de-DE" smtClean="0"/>
-              <a:t>06.04.2025</a:t>
+              <a:t>14.06.25</a:t>
             </a:fld>
             <a:endParaRPr lang="de-DE"/>
           </a:p>
@@ -4730,7 +4736,7 @@
           <a:p>
             <a:fld id="{8F4DBEBF-D0C9-4B7B-97D1-F70115F9845C}" type="slidenum">
               <a:rPr lang="de-DE" smtClean="0"/>
-              <a:t>‹Nr.›</a:t>
+              <a:t>‹#›</a:t>
             </a:fld>
             <a:endParaRPr lang="de-DE"/>
           </a:p>
@@ -4789,7 +4795,7 @@
           <a:p>
             <a:fld id="{FBF94FF0-D490-4F8F-80CF-ADA16F99B118}" type="datetimeFigureOut">
               <a:rPr lang="de-DE" smtClean="0"/>
-              <a:t>06.04.2025</a:t>
+              <a:t>14.06.25</a:t>
             </a:fld>
             <a:endParaRPr lang="de-DE"/>
           </a:p>
@@ -4843,7 +4849,7 @@
           <a:p>
             <a:fld id="{8F4DBEBF-D0C9-4B7B-97D1-F70115F9845C}" type="slidenum">
               <a:rPr lang="de-DE" smtClean="0"/>
-              <a:t>‹Nr.›</a:t>
+              <a:t>‹#›</a:t>
             </a:fld>
             <a:endParaRPr lang="de-DE"/>
           </a:p>
@@ -5100,7 +5106,7 @@
           <a:p>
             <a:fld id="{FBF94FF0-D490-4F8F-80CF-ADA16F99B118}" type="datetimeFigureOut">
               <a:rPr lang="de-DE" smtClean="0"/>
-              <a:t>06.04.2025</a:t>
+              <a:t>14.06.25</a:t>
             </a:fld>
             <a:endParaRPr lang="de-DE"/>
           </a:p>
@@ -5154,7 +5160,7 @@
           <a:p>
             <a:fld id="{8F4DBEBF-D0C9-4B7B-97D1-F70115F9845C}" type="slidenum">
               <a:rPr lang="de-DE" smtClean="0"/>
-              <a:t>‹Nr.›</a:t>
+              <a:t>‹#›</a:t>
             </a:fld>
             <a:endParaRPr lang="de-DE"/>
           </a:p>
@@ -5388,7 +5394,7 @@
           <a:p>
             <a:fld id="{FBF94FF0-D490-4F8F-80CF-ADA16F99B118}" type="datetimeFigureOut">
               <a:rPr lang="de-DE" smtClean="0"/>
-              <a:t>06.04.2025</a:t>
+              <a:t>14.06.25</a:t>
             </a:fld>
             <a:endParaRPr lang="de-DE"/>
           </a:p>
@@ -5442,7 +5448,7 @@
           <a:p>
             <a:fld id="{8F4DBEBF-D0C9-4B7B-97D1-F70115F9845C}" type="slidenum">
               <a:rPr lang="de-DE" smtClean="0"/>
-              <a:t>‹Nr.›</a:t>
+              <a:t>‹#›</a:t>
             </a:fld>
             <a:endParaRPr lang="de-DE"/>
           </a:p>
@@ -5629,7 +5635,7 @@
           <a:p>
             <a:fld id="{FBF94FF0-D490-4F8F-80CF-ADA16F99B118}" type="datetimeFigureOut">
               <a:rPr lang="de-DE" smtClean="0"/>
-              <a:t>06.04.2025</a:t>
+              <a:t>14.06.25</a:t>
             </a:fld>
             <a:endParaRPr lang="de-DE"/>
           </a:p>
@@ -5719,7 +5725,7 @@
           <a:p>
             <a:fld id="{8F4DBEBF-D0C9-4B7B-97D1-F70115F9845C}" type="slidenum">
               <a:rPr lang="de-DE" smtClean="0"/>
-              <a:t>‹Nr.›</a:t>
+              <a:t>‹#›</a:t>
             </a:fld>
             <a:endParaRPr lang="de-DE"/>
           </a:p>
@@ -6059,7 +6065,7 @@
           <p:nvPr>
             <p:extLst>
               <p:ext uri="{D42A27DB-BD31-4B8C-83A1-F6EECF244321}">
-                <p14:modId xmlns:p14="http://schemas.microsoft.com/office/powerpoint/2010/main" val="674577732"/>
+                <p14:modId xmlns:p14="http://schemas.microsoft.com/office/powerpoint/2010/main" val="2589588409"/>
               </p:ext>
             </p:extLst>
           </p:nvPr>
